--- a/ppt_files/DermaLens_Audit.pptx
+++ b/ppt_files/DermaLens_Audit.pptx
@@ -17,7 +17,7 @@
     <p:sldId id="265" r:id="rId11"/>
     <p:sldId id="266" r:id="rId12"/>
     <p:sldId id="267" r:id="rId13"/>
-    <p:sldId id="268" r:id="rId19"/>
+    <p:sldId id="268" r:id="rId22"/>
   </p:sldIdLst>
   <p:notesMasterIdLst>
     <p:notesMasterId r:id="rId14"/>
@@ -1272,7 +1272,147 @@
           <a:lstStyle/>
           <a:p>
             <a:r>
-              <a:t>STEP3-MECHANISM-SLIDE (auto-generated) — generated 2026-09-06T19:13:27 from model/audit artifacts (step3/3b/3c/3d reports + CSVs); same sources as tex_integrate_step3.py. Numbers: AUC V–VI 0.484 [0.382, 0.585]; AK top-contributor share on benign DDI 63.3%; KS 0.76; λ*=0.25; CAM MW p=0.11. Blinded expert review of the 15 triads pending (model/audit/blind_review_protocol.md).</a:t>
+              <a:t>STEP3-MECHANISM-SLIDE (auto-generated) — generated 2026-09-06T22:18:21 from model/audit artifacts (step3/3b/3c/3d reports + CSVs); same sources as tex_integrate_step3.py. Numbers: AUC V–VI 0.484 [0.382, 0.585]; AK top-contributor share on benign DDI 63.3%; KS 0.76; λ*=0.25; CAM MW p=0.11. Blinded expert review of the 15 triads pending (model/audit/blind_review_protocol.md).</a:t>
+            </a:r>
+          </a:p>
+        </p:txBody>
+      </p:sp>
+      <p:sp>
+        <p:nvSpPr>
+          <p:cNvPr id="4" name="Slide Number Placeholder 3"/>
+          <p:cNvSpPr>
+            <a:spLocks noGrp="1"/>
+          </p:cNvSpPr>
+          <p:nvPr>
+            <p:ph type="sldNum" idx="5" sz="quarter"/>
+          </p:nvPr>
+        </p:nvSpPr>
+        <p:spPr/>
+      </p:sp>
+    </p:spTree>
+  </p:cSld>
+  <p:clrMapOvr>
+    <a:masterClrMapping/>
+  </p:clrMapOvr>
+</p:notes>
+</file>
+
+<file path=ppt/notesSlides/notesSlide14.xml><?xml version="1.0" encoding="utf-8"?>
+<p:notes xmlns:a="http://schemas.openxmlformats.org/drawingml/2006/main" xmlns:p="http://schemas.openxmlformats.org/presentationml/2006/main" xmlns:r="http://schemas.openxmlformats.org/officeDocument/2006/relationships">
+  <p:cSld>
+    <p:spTree>
+      <p:nvGrpSpPr>
+        <p:cNvPr id="1" name=""/>
+        <p:cNvGrpSpPr/>
+        <p:nvPr/>
+      </p:nvGrpSpPr>
+      <p:grpSpPr>
+        <a:xfrm>
+          <a:off x="0" y="0"/>
+          <a:ext cx="0" cy="0"/>
+          <a:chOff x="0" y="0"/>
+          <a:chExt cx="0" cy="0"/>
+        </a:xfrm>
+      </p:grpSpPr>
+      <p:sp>
+        <p:nvSpPr>
+          <p:cNvPr id="2" name="Slide Image Placeholder 1"/>
+          <p:cNvSpPr>
+            <a:spLocks noGrp="1"/>
+          </p:cNvSpPr>
+          <p:nvPr>
+            <p:ph type="sldImg" idx="2"/>
+          </p:nvPr>
+        </p:nvSpPr>
+        <p:spPr/>
+      </p:sp>
+      <p:sp>
+        <p:nvSpPr>
+          <p:cNvPr id="3" name="Notes Placeholder 2"/>
+          <p:cNvSpPr>
+            <a:spLocks noGrp="1"/>
+          </p:cNvSpPr>
+          <p:nvPr>
+            <p:ph type="body" idx="3" sz="quarter"/>
+          </p:nvPr>
+        </p:nvSpPr>
+        <p:spPr/>
+        <p:txBody>
+          <a:bodyPr/>
+          <a:lstStyle/>
+          <a:p>
+            <a:r>
+              <a:t>STEP3-MECHANISM-SLIDE (auto-generated) — generated 2026-09-06T22:10:31 from model/audit artifacts (step3/3b/3c/3d reports + CSVs); same sources as tex_integrate_step3.py. Numbers: AUC V–VI 0.484 [0.382, 0.585]; AK top-contributor share on benign DDI 63.3%; KS 0.76; λ*=0.25; CAM MW p=0.11. Blinded expert review of the 15 triads pending (model/audit/blind_review_protocol.md).</a:t>
+            </a:r>
+          </a:p>
+        </p:txBody>
+      </p:sp>
+      <p:sp>
+        <p:nvSpPr>
+          <p:cNvPr id="4" name="Slide Number Placeholder 3"/>
+          <p:cNvSpPr>
+            <a:spLocks noGrp="1"/>
+          </p:cNvSpPr>
+          <p:nvPr>
+            <p:ph type="sldNum" idx="5" sz="quarter"/>
+          </p:nvPr>
+        </p:nvSpPr>
+        <p:spPr/>
+      </p:sp>
+    </p:spTree>
+  </p:cSld>
+  <p:clrMapOvr>
+    <a:masterClrMapping/>
+  </p:clrMapOvr>
+</p:notes>
+</file>
+
+<file path=ppt/notesSlides/notesSlide15.xml><?xml version="1.0" encoding="utf-8"?>
+<p:notes xmlns:a="http://schemas.openxmlformats.org/drawingml/2006/main" xmlns:p="http://schemas.openxmlformats.org/presentationml/2006/main" xmlns:r="http://schemas.openxmlformats.org/officeDocument/2006/relationships">
+  <p:cSld>
+    <p:spTree>
+      <p:nvGrpSpPr>
+        <p:cNvPr id="1" name=""/>
+        <p:cNvGrpSpPr/>
+        <p:nvPr/>
+      </p:nvGrpSpPr>
+      <p:grpSpPr>
+        <a:xfrm>
+          <a:off x="0" y="0"/>
+          <a:ext cx="0" cy="0"/>
+          <a:chOff x="0" y="0"/>
+          <a:chExt cx="0" cy="0"/>
+        </a:xfrm>
+      </p:grpSpPr>
+      <p:sp>
+        <p:nvSpPr>
+          <p:cNvPr id="2" name="Slide Image Placeholder 1"/>
+          <p:cNvSpPr>
+            <a:spLocks noGrp="1"/>
+          </p:cNvSpPr>
+          <p:nvPr>
+            <p:ph type="sldImg" idx="2"/>
+          </p:nvPr>
+        </p:nvSpPr>
+        <p:spPr/>
+      </p:sp>
+      <p:sp>
+        <p:nvSpPr>
+          <p:cNvPr id="3" name="Notes Placeholder 2"/>
+          <p:cNvSpPr>
+            <a:spLocks noGrp="1"/>
+          </p:cNvSpPr>
+          <p:nvPr>
+            <p:ph type="body" idx="3" sz="quarter"/>
+          </p:nvPr>
+        </p:nvSpPr>
+        <p:spPr/>
+        <p:txBody>
+          <a:bodyPr/>
+          <a:lstStyle/>
+          <a:p>
+            <a:r>
+              <a:t>STEP3-MECHANISM-SLIDE (auto-generated) — generated 2026-09-06T22:11:27 from model/audit artifacts (step3/3b/3c/3d reports + CSVs); same sources as tex_integrate_step3.py. Numbers: AUC V–VI 0.484 [0.382, 0.585]; AK top-contributor share on benign DDI 63.3%; KS 0.76; λ*=0.25; CAM MW p=0.11. Blinded expert review of the 15 triads pending (model/audit/blind_review_protocol.md).</a:t>
             </a:r>
           </a:p>
         </p:txBody>
@@ -4010,7 +4150,140 @@
             <a:pPr lvl="1"/>
             <a:r>
               <a:rPr sz="1500" b="0"/>
-              <a:t>CAM comparators bound the mechanism: diffuseness is the AK head's normal behavior (FP 0.023 vs true-AK 0.019, MW p=0.11); field-wide placement is near-identical (edge-band 0.41 vs 0.38, p=0.28). Rulers/ink present in 8/15 FPs but attract no focal activation.</a:t>
+              <a:t>CAM comparators bound the mechanism: at matched clinical modality the FP response is indistinguishable from true AK (diffuseness 0.023 vs 0.019, MW p=0.11; edge-band 0.41 vs 0.38, p=0.28) - rulers/ink in 8/15 FPs attract no focal activation. Modality control (step3e): concentration tracks capture modality, not class - derm AK 0.039 vs derm MEL 0.025 (p=1e-3); AK doubles clinical-to-derm (0.019 to 0.039, p=1e-6). No class-level morphology claim.</a:t>
+            </a:r>
+          </a:p>
+          <a:p>
+            <a:pPr/>
+            <a:r>
+              <a:rPr sz="1500" b="1"/>
+              <a:t>Conclusion: closing the gap requires in-domain training signal (capture-domain hard negatives + tone augmentation) — declared as future work, to be judged against the ROC ceilings.</a:t>
+            </a:r>
+          </a:p>
+        </p:txBody>
+      </p:sp>
+    </p:spTree>
+  </p:cSld>
+  <p:clrMapOvr>
+    <a:masterClrMapping/>
+  </p:clrMapOvr>
+</p:sld>
+</file>
+
+<file path=ppt/slides/slide14.xml><?xml version="1.0" encoding="utf-8"?>
+<p:sld xmlns:a="http://schemas.openxmlformats.org/drawingml/2006/main" xmlns:p="http://schemas.openxmlformats.org/presentationml/2006/main" xmlns:r="http://schemas.openxmlformats.org/officeDocument/2006/relationships">
+  <p:cSld>
+    <p:spTree>
+      <p:nvGrpSpPr>
+        <p:cNvPr id="1" name=""/>
+        <p:cNvGrpSpPr/>
+        <p:nvPr/>
+      </p:nvGrpSpPr>
+      <p:grpSpPr/>
+      <p:sp>
+        <p:nvSpPr>
+          <p:cNvPr id="2" name="TextBox 1"/>
+          <p:cNvSpPr txBox="1"/>
+          <p:nvPr/>
+        </p:nvSpPr>
+        <p:spPr>
+          <a:xfrm>
+            <a:off x="457200" y="320040"/>
+            <a:ext cx="8229600" cy="731520"/>
+          </a:xfrm>
+          <a:prstGeom prst="rect">
+            <a:avLst/>
+          </a:prstGeom>
+          <a:noFill/>
+        </p:spPr>
+        <p:txBody>
+          <a:bodyPr wrap="none">
+            <a:spAutoFit/>
+          </a:bodyPr>
+          <a:lstStyle/>
+          <a:p>
+            <a:r>
+              <a:rPr sz="2400" b="1"/>
+              <a:t>Why thresholds failed: the deficit is representational</a:t>
+            </a:r>
+          </a:p>
+        </p:txBody>
+      </p:sp>
+      <p:sp>
+        <p:nvSpPr>
+          <p:cNvPr id="3" name="TextBox 2"/>
+          <p:cNvSpPr txBox="1"/>
+          <p:nvPr/>
+        </p:nvSpPr>
+        <p:spPr>
+          <a:xfrm>
+            <a:off x="457200" y="1188720"/>
+            <a:ext cx="8229600" cy="5120640"/>
+          </a:xfrm>
+          <a:prstGeom prst="rect">
+            <a:avLst/>
+          </a:prstGeom>
+          <a:noFill/>
+        </p:spPr>
+        <p:txBody>
+          <a:bodyPr wrap="square">
+            <a:spAutoFit/>
+          </a:bodyPr>
+          <a:lstStyle/>
+          <a:p>
+            <a:pPr/>
+            <a:r>
+              <a:rPr sz="1500" b="1"/>
+              <a:t>No operating point exists (per-group ROC ceilings, DDI):</a:t>
+            </a:r>
+          </a:p>
+          <a:p>
+            <a:pPr lvl="1"/>
+            <a:r>
+              <a:rPr sz="1500" b="0"/>
+              <a:t>AUC by group — I–II 0.574  ·  III–IV 0.668  ·  V–VI 0.484 (CI includes 0.5)  ·  ALL 0.585</a:t>
+            </a:r>
+          </a:p>
+          <a:p>
+            <a:pPr lvl="1"/>
+            <a:r>
+              <a:rPr sz="1500" b="0"/>
+              <a:t>The malignancy score carries no measurable ranking signal for FST V–VI images.</a:t>
+            </a:r>
+          </a:p>
+          <a:p>
+            <a:pPr/>
+            <a:r>
+              <a:rPr sz="1500" b="1"/>
+              <a:t>A spurious AK response drives the false positives: the AK column is the top malignant contributor on 63.3% of benign DDI images (one-sided KS 0.76 vs in-domain benigns) and tops all 15 highest-scoring false positives.</a:t>
+            </a:r>
+          </a:p>
+          <a:p>
+            <a:pPr lvl="1"/>
+            <a:r>
+              <a:rPr sz="1500" b="0"/>
+              <a:t>It is a domain effect, not a tone effect: within DDI the AK response is flat-to-highest on the lightest-tone group; at matched tone the DDI-vs-test gap is ~10×.</a:t>
+            </a:r>
+          </a:p>
+          <a:p>
+            <a:pPr/>
+            <a:r>
+              <a:rPr sz="1500" b="1"/>
+              <a:t>Post-hoc repair fails (whack-a-mole):</a:t>
+            </a:r>
+          </a:p>
+          <a:p>
+            <a:pPr lvl="1"/>
+            <a:r>
+              <a:rPr sz="1500" b="0"/>
+              <a:t>per-group thresholds cannot buy specificity without paying sensitivity; AK down-weighting (λ fit on tune half only) peaks at λ*=0.25 with tune AUC 0.596→0.609 (+0.013) and collapses beyond — the argmax migrates AK→BCC/MEL.</a:t>
+            </a:r>
+          </a:p>
+          <a:p>
+            <a:pPr lvl="1"/>
+            <a:r>
+              <a:rPr sz="1500" b="0"/>
+              <a:t>CAM comparators bound the mechanism: at matched clinical modality the FP response is indistinguishable from true AK (diffuseness 0.023 vs 0.019, MW p=0.11; edge-band 0.41 vs 0.38, p=0.28) - rulers/ink in 8/15 FPs attract no focal activation. Modality control (step3e): concentration tracks capture modality, not class - derm AK 0.039 vs derm MEL 0.025 (p=1e-3); AK doubles clinical-to-derm (nan to 0.039, p=1e-6). No class-level morphology claim.</a:t>
             </a:r>
           </a:p>
           <a:p>
